--- a/10-Knowledge-Products/KP2-GIF/videos/module_5/en/decks/KP2_M5_Deck_v0.2.pptx
+++ b/10-Knowledge-Products/KP2-GIF/videos/module_5/en/decks/KP2_M5_Deck_v0.2.pptx
@@ -17989,7 +17989,7 @@
                 </a:solidFill>
                 <a:latin typeface="Arial"/>
               </a:rPr>
-              <a:t>KP2 · MODULE 5 · VIDEO 5.2</a:t>
+              <a:t>MODULE 5 · VIDEO 5.2</a:t>
             </a:r>
           </a:p>
         </p:txBody>
@@ -20958,7 +20958,7 @@
                 </a:solidFill>
                 <a:latin typeface="Arial"/>
               </a:rPr>
-              <a:t>KP2 · MODULE 5 · VIDEO 5.3</a:t>
+              <a:t>MODULE 5 · VIDEO 5.3</a:t>
             </a:r>
           </a:p>
         </p:txBody>
@@ -23517,7 +23517,7 @@
                 </a:solidFill>
                 <a:latin typeface="Arial"/>
               </a:rPr>
-              <a:t>KP2 · MODULE 5 · VIDEO 5.4</a:t>
+              <a:t>MODULE 5 · VIDEO 5.4</a:t>
             </a:r>
           </a:p>
         </p:txBody>
@@ -25390,7 +25390,7 @@
                 </a:solidFill>
                 <a:latin typeface="Arial"/>
               </a:rPr>
-              <a:t>KP2 · MODULE 5 · VIDEO 5.1</a:t>
+              <a:t>MODULE 5 · VIDEO 5.1</a:t>
             </a:r>
           </a:p>
         </p:txBody>
@@ -26727,7 +26727,7 @@
                 </a:solidFill>
                 <a:latin typeface="Arial"/>
               </a:rPr>
-              <a:t>KP2 · MODULE 5 · VIDEO 5.5</a:t>
+              <a:t>MODULE 5 · VIDEO 5.5</a:t>
             </a:r>
           </a:p>
         </p:txBody>
@@ -29374,7 +29374,7 @@
                 </a:solidFill>
                 <a:latin typeface="Arial"/>
               </a:rPr>
-              <a:t>KP2 · MODULE 5 · VIDEO 5.6</a:t>
+              <a:t>MODULE 5 · VIDEO 5.6</a:t>
             </a:r>
           </a:p>
         </p:txBody>
@@ -33742,7 +33742,7 @@
                 </a:solidFill>
                 <a:latin typeface="Arial"/>
               </a:rPr>
-              <a:t>KP2 · MODULE 5 · VIDEO 5.7</a:t>
+              <a:t>MODULE 5 · VIDEO 5.7</a:t>
             </a:r>
           </a:p>
         </p:txBody>
@@ -36606,7 +36606,7 @@
                 </a:solidFill>
                 <a:latin typeface="Arial"/>
               </a:rPr>
-              <a:t>KP2 · MODULE 5 · VIDEO 5.8</a:t>
+              <a:t>MODULE 5 · VIDEO 5.8</a:t>
             </a:r>
           </a:p>
         </p:txBody>
@@ -38794,7 +38794,7 @@
                 </a:solidFill>
                 <a:latin typeface="Arial"/>
               </a:rPr>
-              <a:t>KP2 · MODULE 5 · VIDEO 5.9</a:t>
+              <a:t>MODULE 5 · VIDEO 5.9</a:t>
             </a:r>
           </a:p>
         </p:txBody>
@@ -41686,7 +41686,7 @@
                 </a:solidFill>
                 <a:latin typeface="Arial"/>
               </a:rPr>
-              <a:t>KP2 · MODULE 5 · VIDEO 5.10</a:t>
+              <a:t>MODULE 5 · VIDEO 5.10</a:t>
             </a:r>
           </a:p>
         </p:txBody>
